--- a/week1/1차업무_결과보고_박현수.pptx
+++ b/week1/1차업무_결과보고_박현수.pptx
@@ -5920,9 +5920,64 @@
           </a:p>
         </p:txBody>
       </p:sp>
+      <p:sp>
+        <p:nvSpPr>
+          <p:cNvPr id="8" name="TextBox 7"/>
+          <p:cNvSpPr txBox="1"/>
+          <p:nvPr/>
+        </p:nvSpPr>
+        <p:spPr>
+          <a:xfrm>
+            <a:off x="548640" y="5715000"/>
+            <a:ext cx="5577840" cy="731520"/>
+          </a:xfrm>
+          <a:prstGeom prst="rect">
+            <a:avLst/>
+          </a:prstGeom>
+          <a:noFill/>
+        </p:spPr>
+        <p:txBody>
+          <a:bodyPr wrap="square">
+            <a:spAutoFit/>
+          </a:bodyPr>
+          <a:lstStyle/>
+          <a:p>
+            <a:pPr>
+              <a:spcAft>
+                <a:spcPts val="200"/>
+              </a:spcAft>
+            </a:pPr>
+            <a:r>
+              <a:rPr sz="1050" b="0">
+                <a:solidFill>
+                  <a:srgbClr val="656D76"/>
+                </a:solidFill>
+                <a:latin typeface="맑은 고딕"/>
+              </a:rPr>
+              <a:t>값이 균일한 이미지는 Otsu가 나눌 경계가 없어 면적이 100%로 나온다.</a:t>
+            </a:r>
+          </a:p>
+          <a:p>
+            <a:pPr>
+              <a:spcAft>
+                <a:spcPts val="200"/>
+              </a:spcAft>
+            </a:pPr>
+            <a:r>
+              <a:rPr sz="1050" b="0">
+                <a:solidFill>
+                  <a:srgbClr val="656D76"/>
+                </a:solidFill>
+                <a:latin typeface="맑은 고딕"/>
+              </a:rPr>
+              <a:t>밝기 검사가 먼저 걸러내므로 판정은 옳지만 이 수치 자체엔 의미가 없다.</a:t>
+            </a:r>
+          </a:p>
+        </p:txBody>
+      </p:sp>
       <p:graphicFrame>
         <p:nvGraphicFramePr>
-          <p:cNvPr id="8" name="Table 7"/>
+          <p:cNvPr id="9" name="Table 8"/>
           <p:cNvGraphicFramePr>
             <a:graphicFrameLocks noGrp="1"/>
           </p:cNvGraphicFramePr>
@@ -6075,7 +6130,7 @@
                           </a:solidFill>
                           <a:latin typeface="맑은 고딕"/>
                         </a:rPr>
-                        <a:t>—</a:t>
+                        <a:t>100%</a:t>
                       </a:r>
                     </a:p>
                   </a:txBody>
@@ -6098,7 +6153,7 @@
                           </a:solidFill>
                           <a:latin typeface="맑은 고딕"/>
                         </a:rPr>
-                        <a:t>—</a:t>
+                        <a:t>퇴화 사례</a:t>
                       </a:r>
                     </a:p>
                   </a:txBody>
@@ -6420,7 +6475,7 @@
       </p:graphicFrame>
       <p:sp>
         <p:nvSpPr>
-          <p:cNvPr id="9" name="TextBox 8"/>
+          <p:cNvPr id="10" name="TextBox 9"/>
           <p:cNvSpPr txBox="1"/>
           <p:nvPr/>
         </p:nvSpPr>
@@ -6619,7 +6674,7 @@
       </p:sp>
       <p:sp>
         <p:nvSpPr>
-          <p:cNvPr id="10" name="TextBox 9"/>
+          <p:cNvPr id="11" name="TextBox 10"/>
           <p:cNvSpPr txBox="1"/>
           <p:nvPr/>
         </p:nvSpPr>
@@ -6668,6 +6723,38 @@
                 <a:latin typeface="맑은 고딕"/>
               </a:rPr>
               <a:t>grayscale 0.0011 · blur 0.0021 · flip 0.0000 · rotate 0.0004</a:t>
+            </a:r>
+          </a:p>
+          <a:p>
+            <a:pPr>
+              <a:spcAft>
+                <a:spcPts val="300"/>
+              </a:spcAft>
+            </a:pPr>
+            <a:r>
+              <a:rPr sz="1050" b="0">
+                <a:solidFill>
+                  <a:srgbClr val="656D76"/>
+                </a:solidFill>
+                <a:latin typeface="맑은 고딕"/>
+              </a:rPr>
+              <a:t>(cv2 5.0 기준. 4.12는 회전만 0.81 — warpAffine이 5비트 고정소수점</a:t>
+            </a:r>
+          </a:p>
+          <a:p>
+            <a:pPr>
+              <a:spcAft>
+                <a:spcPts val="300"/>
+              </a:spcAft>
+            </a:pPr>
+            <a:r>
+              <a:rPr sz="1050" b="0">
+                <a:solidFill>
+                  <a:srgbClr val="656D76"/>
+                </a:solidFill>
+                <a:latin typeface="맑은 고딕"/>
+              </a:rPr>
+              <a:t>보간을 쓴다. 전처리 결과와 판정은 두 버전 동일)</a:t>
             </a:r>
           </a:p>
           <a:p>
